--- a/media/resources/files/EkiOrunduuOnduktar_Kemituu_JoopTorchosu.pptx
+++ b/media/resources/files/EkiOrunduuOnduktar_Kemituu_JoopTorchosu.pptx
@@ -20957,7 +20957,7 @@
             </a:pPr>
             <a:r>
               <a:rPr lang="ru-RU" sz="2400" dirty="0"/>
-              <a:t>Турдуу пикирлер учун ыраазычылык билдиребиз.</a:t>
+              <a:t>Түрдүү пикирлер үчүн ыраазычылык билдиребиз.</a:t>
             </a:r>
           </a:p>
           <a:p>

--- a/media/resources/files/EkiOrunduuOnduktar_Kemituu_JoopTorchosu.pptx
+++ b/media/resources/files/EkiOrunduuOnduktar_Kemituu_JoopTorchosu.pptx
@@ -7551,7 +7551,7 @@
                           </a:solidFill>
                           <a:latin typeface="Bahnschrift" panose="020B0502040204020203" pitchFamily="34" charset="0"/>
                         </a:rPr>
-                        <a:t>0.47</a:t>
+                        <a:t>0,47</a:t>
                       </a:r>
                     </a:p>
                   </a:txBody>
@@ -7610,7 +7610,7 @@
                           </a:solidFill>
                           <a:latin typeface="Bahnschrift" panose="020B0502040204020203" pitchFamily="34" charset="0"/>
                         </a:rPr>
-                        <a:t>3.62</a:t>
+                        <a:t>3,62</a:t>
                       </a:r>
                     </a:p>
                   </a:txBody>
@@ -7669,7 +7669,7 @@
                           </a:solidFill>
                           <a:latin typeface="Bahnschrift" panose="020B0502040204020203" pitchFamily="34" charset="0"/>
                         </a:rPr>
-                        <a:t>4.53</a:t>
+                        <a:t>4,53</a:t>
                       </a:r>
                     </a:p>
                   </a:txBody>
@@ -7728,7 +7728,7 @@
                           </a:solidFill>
                           <a:latin typeface="Bahnschrift" panose="020B0502040204020203" pitchFamily="34" charset="0"/>
                         </a:rPr>
-                        <a:t>7.21</a:t>
+                        <a:t>7,21</a:t>
                       </a:r>
                     </a:p>
                   </a:txBody>
@@ -7787,7 +7787,7 @@
                           </a:solidFill>
                           <a:latin typeface="Bahnschrift" panose="020B0502040204020203" pitchFamily="34" charset="0"/>
                         </a:rPr>
-                        <a:t>1.31</a:t>
+                        <a:t>1,31</a:t>
                       </a:r>
                     </a:p>
                   </a:txBody>
@@ -7853,7 +7853,7 @@
                           </a:solidFill>
                           <a:latin typeface="Bahnschrift" panose="020B0502040204020203" pitchFamily="34" charset="0"/>
                         </a:rPr>
-                        <a:t>2.2</a:t>
+                        <a:t>2,2</a:t>
                       </a:r>
                     </a:p>
                   </a:txBody>
@@ -7912,7 +7912,7 @@
                           </a:solidFill>
                           <a:latin typeface="Bahnschrift" panose="020B0502040204020203" pitchFamily="34" charset="0"/>
                         </a:rPr>
-                        <a:t>3.18</a:t>
+                        <a:t>3,18</a:t>
                       </a:r>
                     </a:p>
                   </a:txBody>
@@ -7971,7 +7971,7 @@
                           </a:solidFill>
                           <a:latin typeface="Bahnschrift" panose="020B0502040204020203" pitchFamily="34" charset="0"/>
                         </a:rPr>
-                        <a:t>6.63</a:t>
+                        <a:t>6,63</a:t>
                       </a:r>
                     </a:p>
                   </a:txBody>
@@ -8030,7 +8030,7 @@
                           </a:solidFill>
                           <a:latin typeface="Bahnschrift" panose="020B0502040204020203" pitchFamily="34" charset="0"/>
                         </a:rPr>
-                        <a:t>4.41</a:t>
+                        <a:t>4,41</a:t>
                       </a:r>
                     </a:p>
                   </a:txBody>
@@ -8089,7 +8089,7 @@
                           </a:solidFill>
                           <a:latin typeface="Bahnschrift" panose="020B0502040204020203" pitchFamily="34" charset="0"/>
                         </a:rPr>
-                        <a:t>1.57</a:t>
+                        <a:t>1,57</a:t>
                       </a:r>
                     </a:p>
                   </a:txBody>
@@ -8155,7 +8155,7 @@
                           </a:solidFill>
                           <a:latin typeface="Bahnschrift" panose="020B0502040204020203" pitchFamily="34" charset="0"/>
                         </a:rPr>
-                        <a:t>3.95</a:t>
+                        <a:t>3,95</a:t>
                       </a:r>
                     </a:p>
                   </a:txBody>
@@ -8214,7 +8214,7 @@
                           </a:solidFill>
                           <a:latin typeface="Bahnschrift" panose="020B0502040204020203" pitchFamily="34" charset="0"/>
                         </a:rPr>
-                        <a:t>4.5</a:t>
+                        <a:t>4,5</a:t>
                       </a:r>
                     </a:p>
                   </a:txBody>
@@ -8273,7 +8273,7 @@
                           </a:solidFill>
                           <a:latin typeface="Bahnschrift" panose="020B0502040204020203" pitchFamily="34" charset="0"/>
                         </a:rPr>
-                        <a:t>0.41</a:t>
+                        <a:t>0,41</a:t>
                       </a:r>
                     </a:p>
                   </a:txBody>
@@ -8332,7 +8332,7 @@
                           </a:solidFill>
                           <a:latin typeface="Bahnschrift" panose="020B0502040204020203" pitchFamily="34" charset="0"/>
                         </a:rPr>
-                        <a:t>2.1</a:t>
+                        <a:t>2,1</a:t>
                       </a:r>
                     </a:p>
                   </a:txBody>
@@ -8391,7 +8391,7 @@
                           </a:solidFill>
                           <a:latin typeface="Bahnschrift" panose="020B0502040204020203" pitchFamily="34" charset="0"/>
                         </a:rPr>
-                        <a:t>0.9</a:t>
+                        <a:t>0,9</a:t>
                       </a:r>
                     </a:p>
                   </a:txBody>
@@ -8457,7 +8457,7 @@
                           </a:solidFill>
                           <a:latin typeface="Bahnschrift" panose="020B0502040204020203" pitchFamily="34" charset="0"/>
                         </a:rPr>
-                        <a:t>3.3</a:t>
+                        <a:t>3,3</a:t>
                       </a:r>
                     </a:p>
                   </a:txBody>
@@ -8516,7 +8516,7 @@
                           </a:solidFill>
                           <a:latin typeface="Bahnschrift" panose="020B0502040204020203" pitchFamily="34" charset="0"/>
                         </a:rPr>
-                        <a:t>4.27</a:t>
+                        <a:t>4,27</a:t>
                       </a:r>
                     </a:p>
                   </a:txBody>
@@ -8575,7 +8575,7 @@
                           </a:solidFill>
                           <a:latin typeface="Bahnschrift" panose="020B0502040204020203" pitchFamily="34" charset="0"/>
                         </a:rPr>
-                        <a:t>1.2</a:t>
+                        <a:t>1,2</a:t>
                       </a:r>
                     </a:p>
                   </a:txBody>
@@ -8634,7 +8634,7 @@
                           </a:solidFill>
                           <a:latin typeface="Bahnschrift" panose="020B0502040204020203" pitchFamily="34" charset="0"/>
                         </a:rPr>
-                        <a:t>1.7</a:t>
+                        <a:t>1,7</a:t>
                       </a:r>
                     </a:p>
                   </a:txBody>
@@ -8693,7 +8693,7 @@
                           </a:solidFill>
                           <a:latin typeface="Bahnschrift" panose="020B0502040204020203" pitchFamily="34" charset="0"/>
                         </a:rPr>
-                        <a:t>7.3</a:t>
+                        <a:t>7,3</a:t>
                       </a:r>
                     </a:p>
                   </a:txBody>
@@ -8759,7 +8759,7 @@
                           </a:solidFill>
                           <a:latin typeface="Bahnschrift" panose="020B0502040204020203" pitchFamily="34" charset="0"/>
                         </a:rPr>
-                        <a:t>4.88</a:t>
+                        <a:t>4,88</a:t>
                       </a:r>
                     </a:p>
                   </a:txBody>
@@ -8818,7 +8818,7 @@
                           </a:solidFill>
                           <a:latin typeface="Bahnschrift" panose="020B0502040204020203" pitchFamily="34" charset="0"/>
                         </a:rPr>
-                        <a:t>0.45</a:t>
+                        <a:t>0,45</a:t>
                       </a:r>
                     </a:p>
                   </a:txBody>
@@ -8877,7 +8877,7 @@
                           </a:solidFill>
                           <a:latin typeface="Bahnschrift" panose="020B0502040204020203" pitchFamily="34" charset="0"/>
                         </a:rPr>
-                        <a:t>2.29</a:t>
+                        <a:t>2,29</a:t>
                       </a:r>
                     </a:p>
                   </a:txBody>
@@ -8936,7 +8936,7 @@
                           </a:solidFill>
                           <a:latin typeface="Bahnschrift" panose="020B0502040204020203" pitchFamily="34" charset="0"/>
                         </a:rPr>
-                        <a:t>1.14</a:t>
+                        <a:t>1,14</a:t>
                       </a:r>
                     </a:p>
                   </a:txBody>
@@ -8995,7 +8995,7 @@
                           </a:solidFill>
                           <a:latin typeface="Bahnschrift" panose="020B0502040204020203" pitchFamily="34" charset="0"/>
                         </a:rPr>
-                        <a:t>2.22</a:t>
+                        <a:t>2,22</a:t>
                       </a:r>
                     </a:p>
                   </a:txBody>
@@ -9126,7 +9126,7 @@
                           </a:solidFill>
                           <a:latin typeface="Bahnschrift" panose="020B0502040204020203" pitchFamily="34" charset="0"/>
                         </a:rPr>
-                        <a:t>6.81 – 2.31</a:t>
+                        <a:t>6,81 – 2,31</a:t>
                       </a:r>
                     </a:p>
                   </a:txBody>
@@ -9193,7 +9193,7 @@
                           </a:solidFill>
                           <a:latin typeface="Bahnschrift" panose="020B0502040204020203" pitchFamily="34" charset="0"/>
                         </a:rPr>
-                        <a:t>2.11 – 0.8</a:t>
+                        <a:t>2,11 – 0,8</a:t>
                       </a:r>
                     </a:p>
                   </a:txBody>
@@ -9260,7 +9260,7 @@
                           </a:solidFill>
                           <a:latin typeface="Bahnschrift" panose="020B0502040204020203" pitchFamily="34" charset="0"/>
                         </a:rPr>
-                        <a:t>4.5 – 2.4</a:t>
+                        <a:t>4,5 – 2,4</a:t>
                       </a:r>
                     </a:p>
                   </a:txBody>
@@ -9327,7 +9327,7 @@
                           </a:solidFill>
                           <a:latin typeface="Bahnschrift" panose="020B0502040204020203" pitchFamily="34" charset="0"/>
                         </a:rPr>
-                        <a:t>1.4 – 0.93</a:t>
+                        <a:t>1,4 – 0,93</a:t>
                       </a:r>
                     </a:p>
                   </a:txBody>
@@ -9394,7 +9394,7 @@
                           </a:solidFill>
                           <a:latin typeface="Bahnschrift" panose="020B0502040204020203" pitchFamily="34" charset="0"/>
                         </a:rPr>
-                        <a:t>7.51 – 5.22</a:t>
+                        <a:t>7,51 – 5,22</a:t>
                       </a:r>
                     </a:p>
                   </a:txBody>
@@ -9468,7 +9468,7 @@
                           </a:solidFill>
                           <a:latin typeface="Bahnschrift" panose="020B0502040204020203" pitchFamily="34" charset="0"/>
                         </a:rPr>
-                        <a:t>10.7 – 3.4</a:t>
+                        <a:t>10,7 – 3,4</a:t>
                       </a:r>
                     </a:p>
                   </a:txBody>
@@ -9535,7 +9535,7 @@
                           </a:solidFill>
                           <a:latin typeface="Bahnschrift" panose="020B0502040204020203" pitchFamily="34" charset="0"/>
                         </a:rPr>
-                        <a:t>8.4 – 3.52</a:t>
+                        <a:t>8,4 – 3,52</a:t>
                       </a:r>
                     </a:p>
                   </a:txBody>
@@ -9602,7 +9602,7 @@
                           </a:solidFill>
                           <a:latin typeface="Bahnschrift" panose="020B0502040204020203" pitchFamily="34" charset="0"/>
                         </a:rPr>
-                        <a:t>10.5 – 3.87</a:t>
+                        <a:t>10,5 – 3,87</a:t>
                       </a:r>
                     </a:p>
                   </a:txBody>
@@ -9669,7 +9669,7 @@
                           </a:solidFill>
                           <a:latin typeface="Bahnschrift" panose="020B0502040204020203" pitchFamily="34" charset="0"/>
                         </a:rPr>
-                        <a:t>3.9 – 0.6</a:t>
+                        <a:t>3,9 – 0,6</a:t>
                       </a:r>
                     </a:p>
                   </a:txBody>
@@ -9736,7 +9736,7 @@
                           </a:solidFill>
                           <a:latin typeface="Bahnschrift" panose="020B0502040204020203" pitchFamily="34" charset="0"/>
                         </a:rPr>
-                        <a:t>2.6 – 2.19</a:t>
+                        <a:t>2,6 – 2,19</a:t>
                       </a:r>
                     </a:p>
                   </a:txBody>
@@ -9810,7 +9810,7 @@
                           </a:solidFill>
                           <a:latin typeface="Bahnschrift" panose="020B0502040204020203" pitchFamily="34" charset="0"/>
                         </a:rPr>
-                        <a:t>9.1 – 4.83</a:t>
+                        <a:t>9,1 – 4,83</a:t>
                       </a:r>
                     </a:p>
                   </a:txBody>
@@ -9877,7 +9877,7 @@
                           </a:solidFill>
                           <a:latin typeface="Bahnschrift" panose="020B0502040204020203" pitchFamily="34" charset="0"/>
                         </a:rPr>
-                        <a:t>5.82 – 4.25</a:t>
+                        <a:t>5,82 – 4,25</a:t>
                       </a:r>
                     </a:p>
                   </a:txBody>
@@ -9944,7 +9944,7 @@
                           </a:solidFill>
                           <a:latin typeface="Bahnschrift" panose="020B0502040204020203" pitchFamily="34" charset="0"/>
                         </a:rPr>
-                        <a:t>5.32 – 2.14</a:t>
+                        <a:t>5,32 – 2,14</a:t>
                       </a:r>
                     </a:p>
                   </a:txBody>
@@ -10011,7 +10011,7 @@
                           </a:solidFill>
                           <a:latin typeface="Bahnschrift" panose="020B0502040204020203" pitchFamily="34" charset="0"/>
                         </a:rPr>
-                        <a:t>6.32 – 4.1</a:t>
+                        <a:t>6,32 – 4,1</a:t>
                       </a:r>
                     </a:p>
                   </a:txBody>
@@ -10078,7 +10078,7 @@
                           </a:solidFill>
                           <a:latin typeface="Bahnschrift" panose="020B0502040204020203" pitchFamily="34" charset="0"/>
                         </a:rPr>
-                        <a:t>3.8 – 1.6</a:t>
+                        <a:t>3,8 – 1,6</a:t>
                       </a:r>
                     </a:p>
                   </a:txBody>
@@ -10152,7 +10152,7 @@
                           </a:solidFill>
                           <a:latin typeface="Bahnschrift" panose="020B0502040204020203" pitchFamily="34" charset="0"/>
                         </a:rPr>
-                        <a:t>11.5 – 4.29</a:t>
+                        <a:t>11,5 – 4,29</a:t>
                       </a:r>
                     </a:p>
                   </a:txBody>
@@ -10219,7 +10219,7 @@
                           </a:solidFill>
                           <a:latin typeface="Bahnschrift" panose="020B0502040204020203" pitchFamily="34" charset="0"/>
                         </a:rPr>
-                        <a:t>4.4 – 2.7</a:t>
+                        <a:t>4,4 – 2,7</a:t>
                       </a:r>
                     </a:p>
                   </a:txBody>
@@ -10286,7 +10286,7 @@
                           </a:solidFill>
                           <a:latin typeface="Bahnschrift" panose="020B0502040204020203" pitchFamily="34" charset="0"/>
                         </a:rPr>
-                        <a:t>9.83 – 5.3</a:t>
+                        <a:t>9,83 – 5,3</a:t>
                       </a:r>
                     </a:p>
                   </a:txBody>
@@ -10353,7 +10353,7 @@
                           </a:solidFill>
                           <a:latin typeface="Bahnschrift" panose="020B0502040204020203" pitchFamily="34" charset="0"/>
                         </a:rPr>
-                        <a:t>5.7 – 4.56</a:t>
+                        <a:t>5,7 – 4,56</a:t>
                       </a:r>
                     </a:p>
                   </a:txBody>
@@ -10420,7 +10420,7 @@
                           </a:solidFill>
                           <a:latin typeface="Bahnschrift" panose="020B0502040204020203" pitchFamily="34" charset="0"/>
                         </a:rPr>
-                        <a:t>8.13 – 4.18</a:t>
+                        <a:t>8,13 – 4,18</a:t>
                       </a:r>
                     </a:p>
                   </a:txBody>
@@ -10852,7 +10852,7 @@
                           </a:solidFill>
                           <a:latin typeface="Bahnschrift" panose="020B0502040204020203" pitchFamily="34" charset="0"/>
                         </a:rPr>
-                        <a:t>0.47</a:t>
+                        <a:t>0,47</a:t>
                       </a:r>
                     </a:p>
                   </a:txBody>
@@ -10911,7 +10911,7 @@
                           </a:solidFill>
                           <a:latin typeface="Bahnschrift" panose="020B0502040204020203" pitchFamily="34" charset="0"/>
                         </a:rPr>
-                        <a:t>3.62</a:t>
+                        <a:t>3,62</a:t>
                       </a:r>
                     </a:p>
                   </a:txBody>
@@ -10973,7 +10973,7 @@
                           </a:solidFill>
                           <a:latin typeface="Bahnschrift" panose="020B0502040204020203" pitchFamily="34" charset="0"/>
                         </a:rPr>
-                        <a:t>4.53</a:t>
+                        <a:t>4,53</a:t>
                       </a:r>
                     </a:p>
                   </a:txBody>
@@ -11032,7 +11032,7 @@
                           </a:solidFill>
                           <a:latin typeface="Bahnschrift" panose="020B0502040204020203" pitchFamily="34" charset="0"/>
                         </a:rPr>
-                        <a:t>7.21</a:t>
+                        <a:t>7,21</a:t>
                       </a:r>
                     </a:p>
                   </a:txBody>
@@ -11091,7 +11091,7 @@
                           </a:solidFill>
                           <a:latin typeface="Bahnschrift" panose="020B0502040204020203" pitchFamily="34" charset="0"/>
                         </a:rPr>
-                        <a:t>1.31</a:t>
+                        <a:t>1,31</a:t>
                       </a:r>
                     </a:p>
                   </a:txBody>
@@ -11157,7 +11157,7 @@
                           </a:solidFill>
                           <a:latin typeface="Bahnschrift" panose="020B0502040204020203" pitchFamily="34" charset="0"/>
                         </a:rPr>
-                        <a:t>2.2</a:t>
+                        <a:t>2,2</a:t>
                       </a:r>
                     </a:p>
                   </a:txBody>
@@ -11216,7 +11216,7 @@
                           </a:solidFill>
                           <a:latin typeface="Bahnschrift" panose="020B0502040204020203" pitchFamily="34" charset="0"/>
                         </a:rPr>
-                        <a:t>3.18</a:t>
+                        <a:t>3,18</a:t>
                       </a:r>
                     </a:p>
                   </a:txBody>
@@ -11275,7 +11275,7 @@
                           </a:solidFill>
                           <a:latin typeface="Bahnschrift" panose="020B0502040204020203" pitchFamily="34" charset="0"/>
                         </a:rPr>
-                        <a:t>6.63</a:t>
+                        <a:t>6,63</a:t>
                       </a:r>
                     </a:p>
                   </a:txBody>
@@ -11334,7 +11334,7 @@
                           </a:solidFill>
                           <a:latin typeface="Bahnschrift" panose="020B0502040204020203" pitchFamily="34" charset="0"/>
                         </a:rPr>
-                        <a:t>4.41</a:t>
+                        <a:t>4,41</a:t>
                       </a:r>
                     </a:p>
                   </a:txBody>
@@ -11396,7 +11396,7 @@
                           </a:solidFill>
                           <a:latin typeface="Bahnschrift" panose="020B0502040204020203" pitchFamily="34" charset="0"/>
                         </a:rPr>
-                        <a:t>1.57</a:t>
+                        <a:t>1,57</a:t>
                       </a:r>
                     </a:p>
                   </a:txBody>
@@ -11462,7 +11462,7 @@
                           </a:solidFill>
                           <a:latin typeface="Bahnschrift" panose="020B0502040204020203" pitchFamily="34" charset="0"/>
                         </a:rPr>
-                        <a:t>3.95</a:t>
+                        <a:t>3,95</a:t>
                       </a:r>
                     </a:p>
                   </a:txBody>
@@ -11521,7 +11521,7 @@
                           </a:solidFill>
                           <a:latin typeface="Bahnschrift" panose="020B0502040204020203" pitchFamily="34" charset="0"/>
                         </a:rPr>
-                        <a:t>4.5</a:t>
+                        <a:t>4,5</a:t>
                       </a:r>
                     </a:p>
                   </a:txBody>
@@ -11580,7 +11580,7 @@
                           </a:solidFill>
                           <a:latin typeface="Bahnschrift" panose="020B0502040204020203" pitchFamily="34" charset="0"/>
                         </a:rPr>
-                        <a:t>0.41</a:t>
+                        <a:t>0,41</a:t>
                       </a:r>
                     </a:p>
                   </a:txBody>
@@ -11639,7 +11639,7 @@
                           </a:solidFill>
                           <a:latin typeface="Bahnschrift" panose="020B0502040204020203" pitchFamily="34" charset="0"/>
                         </a:rPr>
-                        <a:t>2.1</a:t>
+                        <a:t>2,1</a:t>
                       </a:r>
                     </a:p>
                   </a:txBody>
@@ -11698,7 +11698,7 @@
                           </a:solidFill>
                           <a:latin typeface="Bahnschrift" panose="020B0502040204020203" pitchFamily="34" charset="0"/>
                         </a:rPr>
-                        <a:t>0.9</a:t>
+                        <a:t>0,9</a:t>
                       </a:r>
                     </a:p>
                   </a:txBody>
@@ -11767,7 +11767,7 @@
                           </a:solidFill>
                           <a:latin typeface="Bahnschrift" panose="020B0502040204020203" pitchFamily="34" charset="0"/>
                         </a:rPr>
-                        <a:t>3.3</a:t>
+                        <a:t>3,3</a:t>
                       </a:r>
                     </a:p>
                   </a:txBody>
@@ -11826,7 +11826,7 @@
                           </a:solidFill>
                           <a:latin typeface="Bahnschrift" panose="020B0502040204020203" pitchFamily="34" charset="0"/>
                         </a:rPr>
-                        <a:t>4.27</a:t>
+                        <a:t>4,27</a:t>
                       </a:r>
                     </a:p>
                   </a:txBody>
@@ -11885,7 +11885,7 @@
                           </a:solidFill>
                           <a:latin typeface="Bahnschrift" panose="020B0502040204020203" pitchFamily="34" charset="0"/>
                         </a:rPr>
-                        <a:t>1.2</a:t>
+                        <a:t>1,2</a:t>
                       </a:r>
                     </a:p>
                   </a:txBody>
@@ -11947,7 +11947,7 @@
                           </a:solidFill>
                           <a:latin typeface="Bahnschrift" panose="020B0502040204020203" pitchFamily="34" charset="0"/>
                         </a:rPr>
-                        <a:t>1.7</a:t>
+                        <a:t>1,7</a:t>
                       </a:r>
                     </a:p>
                   </a:txBody>
@@ -12006,7 +12006,7 @@
                           </a:solidFill>
                           <a:latin typeface="Bahnschrift" panose="020B0502040204020203" pitchFamily="34" charset="0"/>
                         </a:rPr>
-                        <a:t>7.3</a:t>
+                        <a:t>7,3</a:t>
                       </a:r>
                     </a:p>
                   </a:txBody>
@@ -12072,7 +12072,7 @@
                           </a:solidFill>
                           <a:latin typeface="Bahnschrift" panose="020B0502040204020203" pitchFamily="34" charset="0"/>
                         </a:rPr>
-                        <a:t>4.88</a:t>
+                        <a:t>4,88</a:t>
                       </a:r>
                     </a:p>
                   </a:txBody>
@@ -12131,7 +12131,7 @@
                           </a:solidFill>
                           <a:latin typeface="Bahnschrift" panose="020B0502040204020203" pitchFamily="34" charset="0"/>
                         </a:rPr>
-                        <a:t>0.45</a:t>
+                        <a:t>0,45</a:t>
                       </a:r>
                     </a:p>
                   </a:txBody>
@@ -12193,7 +12193,7 @@
                           </a:solidFill>
                           <a:latin typeface="Bahnschrift" panose="020B0502040204020203" pitchFamily="34" charset="0"/>
                         </a:rPr>
-                        <a:t>2.29</a:t>
+                        <a:t>2,29</a:t>
                       </a:r>
                     </a:p>
                   </a:txBody>
@@ -12252,7 +12252,7 @@
                           </a:solidFill>
                           <a:latin typeface="Bahnschrift" panose="020B0502040204020203" pitchFamily="34" charset="0"/>
                         </a:rPr>
-                        <a:t>1.14</a:t>
+                        <a:t>1,14</a:t>
                       </a:r>
                     </a:p>
                   </a:txBody>
@@ -12311,7 +12311,7 @@
                           </a:solidFill>
                           <a:latin typeface="Bahnschrift" panose="020B0502040204020203" pitchFamily="34" charset="0"/>
                         </a:rPr>
-                        <a:t>2.22</a:t>
+                        <a:t>2,22</a:t>
                       </a:r>
                     </a:p>
                   </a:txBody>
@@ -12442,7 +12442,7 @@
                           </a:solidFill>
                           <a:latin typeface="Bahnschrift" panose="020B0502040204020203" pitchFamily="34" charset="0"/>
                         </a:rPr>
-                        <a:t>6.81 – 2.31</a:t>
+                        <a:t>6,81 – 2,31</a:t>
                       </a:r>
                     </a:p>
                   </a:txBody>
@@ -12509,7 +12509,7 @@
                           </a:solidFill>
                           <a:latin typeface="Bahnschrift" panose="020B0502040204020203" pitchFamily="34" charset="0"/>
                         </a:rPr>
-                        <a:t>2.11 – 0.8</a:t>
+                        <a:t>2,11 – 0,8</a:t>
                       </a:r>
                     </a:p>
                   </a:txBody>
@@ -12576,7 +12576,7 @@
                           </a:solidFill>
                           <a:latin typeface="Bahnschrift" panose="020B0502040204020203" pitchFamily="34" charset="0"/>
                         </a:rPr>
-                        <a:t>4.5 – 2.4</a:t>
+                        <a:t>4,5 – 2,4</a:t>
                       </a:r>
                     </a:p>
                   </a:txBody>
@@ -12643,7 +12643,7 @@
                           </a:solidFill>
                           <a:latin typeface="Bahnschrift" panose="020B0502040204020203" pitchFamily="34" charset="0"/>
                         </a:rPr>
-                        <a:t>1.4 – 0.93</a:t>
+                        <a:t>1,4 – 0,93</a:t>
                       </a:r>
                     </a:p>
                   </a:txBody>
@@ -12710,7 +12710,7 @@
                           </a:solidFill>
                           <a:latin typeface="Bahnschrift" panose="020B0502040204020203" pitchFamily="34" charset="0"/>
                         </a:rPr>
-                        <a:t>7.51 – 5.22</a:t>
+                        <a:t>7,51 – 5,22</a:t>
                       </a:r>
                     </a:p>
                   </a:txBody>
@@ -12784,7 +12784,7 @@
                           </a:solidFill>
                           <a:latin typeface="Bahnschrift" panose="020B0502040204020203" pitchFamily="34" charset="0"/>
                         </a:rPr>
-                        <a:t>10.7 – 3.4</a:t>
+                        <a:t>10,7 – 3,4</a:t>
                       </a:r>
                     </a:p>
                   </a:txBody>
@@ -12851,7 +12851,7 @@
                           </a:solidFill>
                           <a:latin typeface="Bahnschrift" panose="020B0502040204020203" pitchFamily="34" charset="0"/>
                         </a:rPr>
-                        <a:t>8.4 – 3.52</a:t>
+                        <a:t>8,4 – 3,52</a:t>
                       </a:r>
                     </a:p>
                   </a:txBody>
@@ -12918,7 +12918,7 @@
                           </a:solidFill>
                           <a:latin typeface="Bahnschrift" panose="020B0502040204020203" pitchFamily="34" charset="0"/>
                         </a:rPr>
-                        <a:t>10.5 – 3.87</a:t>
+                        <a:t>10,5 – 3,87</a:t>
                       </a:r>
                     </a:p>
                   </a:txBody>
@@ -12985,7 +12985,7 @@
                           </a:solidFill>
                           <a:latin typeface="Bahnschrift" panose="020B0502040204020203" pitchFamily="34" charset="0"/>
                         </a:rPr>
-                        <a:t>3.9 – 0.6</a:t>
+                        <a:t>3,9 – 0,6</a:t>
                       </a:r>
                     </a:p>
                   </a:txBody>
@@ -13052,7 +13052,7 @@
                           </a:solidFill>
                           <a:latin typeface="Bahnschrift" panose="020B0502040204020203" pitchFamily="34" charset="0"/>
                         </a:rPr>
-                        <a:t>2.6 – 2.19</a:t>
+                        <a:t>2,6 – 2,19</a:t>
                       </a:r>
                     </a:p>
                   </a:txBody>
@@ -13126,7 +13126,7 @@
                           </a:solidFill>
                           <a:latin typeface="Bahnschrift" panose="020B0502040204020203" pitchFamily="34" charset="0"/>
                         </a:rPr>
-                        <a:t>9.1 – 4.83</a:t>
+                        <a:t>9,1 – 4,83</a:t>
                       </a:r>
                     </a:p>
                   </a:txBody>
@@ -13193,7 +13193,7 @@
                           </a:solidFill>
                           <a:latin typeface="Bahnschrift" panose="020B0502040204020203" pitchFamily="34" charset="0"/>
                         </a:rPr>
-                        <a:t>5.82 – 4.25</a:t>
+                        <a:t>5,82 – 4,25</a:t>
                       </a:r>
                     </a:p>
                   </a:txBody>
@@ -13260,7 +13260,7 @@
                           </a:solidFill>
                           <a:latin typeface="Bahnschrift" panose="020B0502040204020203" pitchFamily="34" charset="0"/>
                         </a:rPr>
-                        <a:t>5.32 – 2.14</a:t>
+                        <a:t>5,32 – 2,14</a:t>
                       </a:r>
                     </a:p>
                   </a:txBody>
@@ -13327,7 +13327,7 @@
                           </a:solidFill>
                           <a:latin typeface="Bahnschrift" panose="020B0502040204020203" pitchFamily="34" charset="0"/>
                         </a:rPr>
-                        <a:t>6.32 – 4.1</a:t>
+                        <a:t>6,32 – 4,1</a:t>
                       </a:r>
                     </a:p>
                   </a:txBody>
@@ -13394,7 +13394,7 @@
                           </a:solidFill>
                           <a:latin typeface="Bahnschrift" panose="020B0502040204020203" pitchFamily="34" charset="0"/>
                         </a:rPr>
-                        <a:t>3.8 – 1.6</a:t>
+                        <a:t>3,8 – 1,6</a:t>
                       </a:r>
                     </a:p>
                   </a:txBody>
@@ -13468,7 +13468,7 @@
                           </a:solidFill>
                           <a:latin typeface="Bahnschrift" panose="020B0502040204020203" pitchFamily="34" charset="0"/>
                         </a:rPr>
-                        <a:t>11.5 – 4.29</a:t>
+                        <a:t>11,5 – 4,29</a:t>
                       </a:r>
                     </a:p>
                   </a:txBody>
@@ -13535,7 +13535,7 @@
                           </a:solidFill>
                           <a:latin typeface="Bahnschrift" panose="020B0502040204020203" pitchFamily="34" charset="0"/>
                         </a:rPr>
-                        <a:t>4.4 – 2.7</a:t>
+                        <a:t>4,4 – 2,7</a:t>
                       </a:r>
                     </a:p>
                   </a:txBody>
@@ -13602,7 +13602,7 @@
                           </a:solidFill>
                           <a:latin typeface="Bahnschrift" panose="020B0502040204020203" pitchFamily="34" charset="0"/>
                         </a:rPr>
-                        <a:t>9.83 – 5.3</a:t>
+                        <a:t>9,83 – 5,3</a:t>
                       </a:r>
                     </a:p>
                   </a:txBody>
@@ -13669,7 +13669,7 @@
                           </a:solidFill>
                           <a:latin typeface="Bahnschrift" panose="020B0502040204020203" pitchFamily="34" charset="0"/>
                         </a:rPr>
-                        <a:t>5.7 – 4.56</a:t>
+                        <a:t>5,7 – 4,56</a:t>
                       </a:r>
                     </a:p>
                   </a:txBody>
@@ -13736,7 +13736,7 @@
                           </a:solidFill>
                           <a:latin typeface="Bahnschrift" panose="020B0502040204020203" pitchFamily="34" charset="0"/>
                         </a:rPr>
-                        <a:t>8.13 – 4.18</a:t>
+                        <a:t>8,13 – 4,18</a:t>
                       </a:r>
                     </a:p>
                   </a:txBody>
@@ -13846,7 +13846,7 @@
                             <a:sysClr val="windowText" lastClr="000000"/>
                           </a:solidFill>
                         </a:rPr>
-                        <a:t>10.58</a:t>
+                        <a:t>10,58</a:t>
                       </a:r>
                     </a:p>
                   </a:txBody>
@@ -14271,7 +14271,7 @@
                           </a:solidFill>
                           <a:latin typeface="Bahnschrift" panose="020B0502040204020203" pitchFamily="34" charset="0"/>
                         </a:rPr>
-                        <a:t>0.47</a:t>
+                        <a:t>0,47</a:t>
                       </a:r>
                     </a:p>
                   </a:txBody>
@@ -14330,7 +14330,7 @@
                           </a:solidFill>
                           <a:latin typeface="Bahnschrift" panose="020B0502040204020203" pitchFamily="34" charset="0"/>
                         </a:rPr>
-                        <a:t>3.62</a:t>
+                        <a:t>3,62</a:t>
                       </a:r>
                     </a:p>
                   </a:txBody>
@@ -14389,7 +14389,7 @@
                           </a:solidFill>
                           <a:latin typeface="Bahnschrift" panose="020B0502040204020203" pitchFamily="34" charset="0"/>
                         </a:rPr>
-                        <a:t>4.53</a:t>
+                        <a:t>4,53</a:t>
                       </a:r>
                     </a:p>
                   </a:txBody>
@@ -14448,7 +14448,7 @@
                           </a:solidFill>
                           <a:latin typeface="Bahnschrift" panose="020B0502040204020203" pitchFamily="34" charset="0"/>
                         </a:rPr>
-                        <a:t>7.21</a:t>
+                        <a:t>7,21</a:t>
                       </a:r>
                     </a:p>
                   </a:txBody>
@@ -14507,7 +14507,7 @@
                           </a:solidFill>
                           <a:latin typeface="Bahnschrift" panose="020B0502040204020203" pitchFamily="34" charset="0"/>
                         </a:rPr>
-                        <a:t>1.31</a:t>
+                        <a:t>1,31</a:t>
                       </a:r>
                     </a:p>
                   </a:txBody>
@@ -14573,7 +14573,7 @@
                           </a:solidFill>
                           <a:latin typeface="Bahnschrift" panose="020B0502040204020203" pitchFamily="34" charset="0"/>
                         </a:rPr>
-                        <a:t>2.2</a:t>
+                        <a:t>2,2</a:t>
                       </a:r>
                     </a:p>
                   </a:txBody>
@@ -14632,7 +14632,7 @@
                           </a:solidFill>
                           <a:latin typeface="Bahnschrift" panose="020B0502040204020203" pitchFamily="34" charset="0"/>
                         </a:rPr>
-                        <a:t>3.18</a:t>
+                        <a:t>3,18</a:t>
                       </a:r>
                     </a:p>
                   </a:txBody>
@@ -14691,7 +14691,7 @@
                           </a:solidFill>
                           <a:latin typeface="Bahnschrift" panose="020B0502040204020203" pitchFamily="34" charset="0"/>
                         </a:rPr>
-                        <a:t>6.63</a:t>
+                        <a:t>6,63</a:t>
                       </a:r>
                     </a:p>
                   </a:txBody>
@@ -14750,7 +14750,7 @@
                           </a:solidFill>
                           <a:latin typeface="Bahnschrift" panose="020B0502040204020203" pitchFamily="34" charset="0"/>
                         </a:rPr>
-                        <a:t>4.41</a:t>
+                        <a:t>4,41</a:t>
                       </a:r>
                     </a:p>
                   </a:txBody>
@@ -14809,7 +14809,7 @@
                           </a:solidFill>
                           <a:latin typeface="Bahnschrift" panose="020B0502040204020203" pitchFamily="34" charset="0"/>
                         </a:rPr>
-                        <a:t>1.57</a:t>
+                        <a:t>1,57</a:t>
                       </a:r>
                     </a:p>
                   </a:txBody>
@@ -14875,7 +14875,7 @@
                           </a:solidFill>
                           <a:latin typeface="Bahnschrift" panose="020B0502040204020203" pitchFamily="34" charset="0"/>
                         </a:rPr>
-                        <a:t>3.95</a:t>
+                        <a:t>3,95</a:t>
                       </a:r>
                     </a:p>
                   </a:txBody>
@@ -14934,7 +14934,7 @@
                           </a:solidFill>
                           <a:latin typeface="Bahnschrift" panose="020B0502040204020203" pitchFamily="34" charset="0"/>
                         </a:rPr>
-                        <a:t>4.5</a:t>
+                        <a:t>4,5</a:t>
                       </a:r>
                     </a:p>
                   </a:txBody>
@@ -14993,7 +14993,7 @@
                           </a:solidFill>
                           <a:latin typeface="Bahnschrift" panose="020B0502040204020203" pitchFamily="34" charset="0"/>
                         </a:rPr>
-                        <a:t>0.41</a:t>
+                        <a:t>0,41</a:t>
                       </a:r>
                     </a:p>
                   </a:txBody>
@@ -15052,7 +15052,7 @@
                           </a:solidFill>
                           <a:latin typeface="Bahnschrift" panose="020B0502040204020203" pitchFamily="34" charset="0"/>
                         </a:rPr>
-                        <a:t>2.1</a:t>
+                        <a:t>2,1</a:t>
                       </a:r>
                     </a:p>
                   </a:txBody>
@@ -15111,7 +15111,7 @@
                           </a:solidFill>
                           <a:latin typeface="Bahnschrift" panose="020B0502040204020203" pitchFamily="34" charset="0"/>
                         </a:rPr>
-                        <a:t>0.9</a:t>
+                        <a:t>0,9</a:t>
                       </a:r>
                     </a:p>
                   </a:txBody>
@@ -15177,7 +15177,7 @@
                           </a:solidFill>
                           <a:latin typeface="Bahnschrift" panose="020B0502040204020203" pitchFamily="34" charset="0"/>
                         </a:rPr>
-                        <a:t>3.3</a:t>
+                        <a:t>3,3</a:t>
                       </a:r>
                     </a:p>
                   </a:txBody>
@@ -15236,7 +15236,7 @@
                           </a:solidFill>
                           <a:latin typeface="Bahnschrift" panose="020B0502040204020203" pitchFamily="34" charset="0"/>
                         </a:rPr>
-                        <a:t>4.27</a:t>
+                        <a:t>4,27</a:t>
                       </a:r>
                     </a:p>
                   </a:txBody>
@@ -15295,7 +15295,7 @@
                           </a:solidFill>
                           <a:latin typeface="Bahnschrift" panose="020B0502040204020203" pitchFamily="34" charset="0"/>
                         </a:rPr>
-                        <a:t>1.2</a:t>
+                        <a:t>1,2</a:t>
                       </a:r>
                     </a:p>
                   </a:txBody>
@@ -15354,7 +15354,7 @@
                           </a:solidFill>
                           <a:latin typeface="Bahnschrift" panose="020B0502040204020203" pitchFamily="34" charset="0"/>
                         </a:rPr>
-                        <a:t>1.7</a:t>
+                        <a:t>1,7</a:t>
                       </a:r>
                     </a:p>
                   </a:txBody>
@@ -15413,7 +15413,7 @@
                           </a:solidFill>
                           <a:latin typeface="Bahnschrift" panose="020B0502040204020203" pitchFamily="34" charset="0"/>
                         </a:rPr>
-                        <a:t>7.3</a:t>
+                        <a:t>7,3</a:t>
                       </a:r>
                     </a:p>
                   </a:txBody>
@@ -15479,7 +15479,7 @@
                           </a:solidFill>
                           <a:latin typeface="Bahnschrift" panose="020B0502040204020203" pitchFamily="34" charset="0"/>
                         </a:rPr>
-                        <a:t>4.88</a:t>
+                        <a:t>4,88</a:t>
                       </a:r>
                     </a:p>
                   </a:txBody>
@@ -15538,7 +15538,7 @@
                           </a:solidFill>
                           <a:latin typeface="Bahnschrift" panose="020B0502040204020203" pitchFamily="34" charset="0"/>
                         </a:rPr>
-                        <a:t>0.45</a:t>
+                        <a:t>0,45</a:t>
                       </a:r>
                     </a:p>
                   </a:txBody>
@@ -15597,7 +15597,7 @@
                           </a:solidFill>
                           <a:latin typeface="Bahnschrift" panose="020B0502040204020203" pitchFamily="34" charset="0"/>
                         </a:rPr>
-                        <a:t>2.29</a:t>
+                        <a:t>2,29</a:t>
                       </a:r>
                     </a:p>
                   </a:txBody>
@@ -15656,7 +15656,7 @@
                           </a:solidFill>
                           <a:latin typeface="Bahnschrift" panose="020B0502040204020203" pitchFamily="34" charset="0"/>
                         </a:rPr>
-                        <a:t>1.14</a:t>
+                        <a:t>1,14</a:t>
                       </a:r>
                     </a:p>
                   </a:txBody>
@@ -15715,7 +15715,7 @@
                           </a:solidFill>
                           <a:latin typeface="Bahnschrift" panose="020B0502040204020203" pitchFamily="34" charset="0"/>
                         </a:rPr>
-                        <a:t>2.22</a:t>
+                        <a:t>2,22</a:t>
                       </a:r>
                     </a:p>
                   </a:txBody>
@@ -15846,7 +15846,7 @@
                           </a:solidFill>
                           <a:latin typeface="Bahnschrift" panose="020B0502040204020203" pitchFamily="34" charset="0"/>
                         </a:rPr>
-                        <a:t>6.81 – 2.31</a:t>
+                        <a:t>6,81 – 2,31</a:t>
                       </a:r>
                     </a:p>
                   </a:txBody>
@@ -15913,7 +15913,7 @@
                           </a:solidFill>
                           <a:latin typeface="Bahnschrift" panose="020B0502040204020203" pitchFamily="34" charset="0"/>
                         </a:rPr>
-                        <a:t>2.11 – 0.8</a:t>
+                        <a:t>2,11 – 0,8</a:t>
                       </a:r>
                     </a:p>
                   </a:txBody>
@@ -15980,7 +15980,7 @@
                           </a:solidFill>
                           <a:latin typeface="Bahnschrift" panose="020B0502040204020203" pitchFamily="34" charset="0"/>
                         </a:rPr>
-                        <a:t>4.5 – 2.4</a:t>
+                        <a:t>4,5 – 2,4</a:t>
                       </a:r>
                     </a:p>
                   </a:txBody>
@@ -16047,7 +16047,7 @@
                           </a:solidFill>
                           <a:latin typeface="Bahnschrift" panose="020B0502040204020203" pitchFamily="34" charset="0"/>
                         </a:rPr>
-                        <a:t>1.4 – 0.93</a:t>
+                        <a:t>1,4 – 0,93</a:t>
                       </a:r>
                     </a:p>
                   </a:txBody>
@@ -16114,7 +16114,7 @@
                           </a:solidFill>
                           <a:latin typeface="Bahnschrift" panose="020B0502040204020203" pitchFamily="34" charset="0"/>
                         </a:rPr>
-                        <a:t>7.51 – 5.22</a:t>
+                        <a:t>7,51 – 5,22</a:t>
                       </a:r>
                     </a:p>
                   </a:txBody>
@@ -16188,7 +16188,7 @@
                           </a:solidFill>
                           <a:latin typeface="Bahnschrift" panose="020B0502040204020203" pitchFamily="34" charset="0"/>
                         </a:rPr>
-                        <a:t>10.7 – 3.4</a:t>
+                        <a:t>10,7 – 3,4</a:t>
                       </a:r>
                     </a:p>
                   </a:txBody>
@@ -16255,7 +16255,7 @@
                           </a:solidFill>
                           <a:latin typeface="Bahnschrift" panose="020B0502040204020203" pitchFamily="34" charset="0"/>
                         </a:rPr>
-                        <a:t>8.4 – 3.52</a:t>
+                        <a:t>8,4 – 3,52</a:t>
                       </a:r>
                     </a:p>
                   </a:txBody>
@@ -16322,7 +16322,7 @@
                           </a:solidFill>
                           <a:latin typeface="Bahnschrift" panose="020B0502040204020203" pitchFamily="34" charset="0"/>
                         </a:rPr>
-                        <a:t>10.5 – 3.87</a:t>
+                        <a:t>10,5 – 3,87</a:t>
                       </a:r>
                     </a:p>
                   </a:txBody>
@@ -16389,7 +16389,7 @@
                           </a:solidFill>
                           <a:latin typeface="Bahnschrift" panose="020B0502040204020203" pitchFamily="34" charset="0"/>
                         </a:rPr>
-                        <a:t>3.9 – 0.6</a:t>
+                        <a:t>3,9 – 0,6</a:t>
                       </a:r>
                     </a:p>
                   </a:txBody>
@@ -16456,7 +16456,7 @@
                           </a:solidFill>
                           <a:latin typeface="Bahnschrift" panose="020B0502040204020203" pitchFamily="34" charset="0"/>
                         </a:rPr>
-                        <a:t>2.6 – 2.19</a:t>
+                        <a:t>2,6 – 2,19</a:t>
                       </a:r>
                     </a:p>
                   </a:txBody>
@@ -16530,7 +16530,7 @@
                           </a:solidFill>
                           <a:latin typeface="Bahnschrift" panose="020B0502040204020203" pitchFamily="34" charset="0"/>
                         </a:rPr>
-                        <a:t>9.1 – 4.83</a:t>
+                        <a:t>9,1 – 4,83</a:t>
                       </a:r>
                     </a:p>
                   </a:txBody>
@@ -16597,7 +16597,7 @@
                           </a:solidFill>
                           <a:latin typeface="Bahnschrift" panose="020B0502040204020203" pitchFamily="34" charset="0"/>
                         </a:rPr>
-                        <a:t>5.82 – 4.25</a:t>
+                        <a:t>5,82 – 4,25</a:t>
                       </a:r>
                     </a:p>
                   </a:txBody>
@@ -16664,7 +16664,7 @@
                           </a:solidFill>
                           <a:latin typeface="Bahnschrift" panose="020B0502040204020203" pitchFamily="34" charset="0"/>
                         </a:rPr>
-                        <a:t>5.32 – 2.14</a:t>
+                        <a:t>5,32 – 2,14</a:t>
                       </a:r>
                     </a:p>
                   </a:txBody>
@@ -16731,7 +16731,7 @@
                           </a:solidFill>
                           <a:latin typeface="Bahnschrift" panose="020B0502040204020203" pitchFamily="34" charset="0"/>
                         </a:rPr>
-                        <a:t>6.32 – 4.1</a:t>
+                        <a:t>6,32 – 4,1</a:t>
                       </a:r>
                     </a:p>
                   </a:txBody>
@@ -16798,7 +16798,7 @@
                           </a:solidFill>
                           <a:latin typeface="Bahnschrift" panose="020B0502040204020203" pitchFamily="34" charset="0"/>
                         </a:rPr>
-                        <a:t>3.8 – 1.6</a:t>
+                        <a:t>3,8 – 1,6</a:t>
                       </a:r>
                     </a:p>
                   </a:txBody>
@@ -16872,7 +16872,7 @@
                           </a:solidFill>
                           <a:latin typeface="Bahnschrift" panose="020B0502040204020203" pitchFamily="34" charset="0"/>
                         </a:rPr>
-                        <a:t>11.5 – 4.29</a:t>
+                        <a:t>11,5 – 4,29</a:t>
                       </a:r>
                     </a:p>
                   </a:txBody>
@@ -16939,7 +16939,7 @@
                           </a:solidFill>
                           <a:latin typeface="Bahnschrift" panose="020B0502040204020203" pitchFamily="34" charset="0"/>
                         </a:rPr>
-                        <a:t>4.4 – 2.7</a:t>
+                        <a:t>4,4 – 2,7</a:t>
                       </a:r>
                     </a:p>
                   </a:txBody>
@@ -17006,7 +17006,7 @@
                           </a:solidFill>
                           <a:latin typeface="Bahnschrift" panose="020B0502040204020203" pitchFamily="34" charset="0"/>
                         </a:rPr>
-                        <a:t>9.83 – 5.3</a:t>
+                        <a:t>9,83 – 5,3</a:t>
                       </a:r>
                     </a:p>
                   </a:txBody>
@@ -17073,7 +17073,7 @@
                           </a:solidFill>
                           <a:latin typeface="Bahnschrift" panose="020B0502040204020203" pitchFamily="34" charset="0"/>
                         </a:rPr>
-                        <a:t>5.7 – 4.56</a:t>
+                        <a:t>5,7 – 4,56</a:t>
                       </a:r>
                     </a:p>
                   </a:txBody>
@@ -17140,7 +17140,7 @@
                           </a:solidFill>
                           <a:latin typeface="Bahnschrift" panose="020B0502040204020203" pitchFamily="34" charset="0"/>
                         </a:rPr>
-                        <a:t>8.13 – 4.18</a:t>
+                        <a:t>8,13 – 4,18</a:t>
                       </a:r>
                     </a:p>
                   </a:txBody>
@@ -17548,7 +17548,7 @@
                           </a:solidFill>
                           <a:latin typeface="Bahnschrift" panose="020B0502040204020203" pitchFamily="34" charset="0"/>
                         </a:rPr>
-                        <a:t>0.47</a:t>
+                        <a:t>0,47</a:t>
                       </a:r>
                     </a:p>
                   </a:txBody>
@@ -17607,7 +17607,7 @@
                           </a:solidFill>
                           <a:latin typeface="Bahnschrift" panose="020B0502040204020203" pitchFamily="34" charset="0"/>
                         </a:rPr>
-                        <a:t>3.62</a:t>
+                        <a:t>3,62</a:t>
                       </a:r>
                     </a:p>
                   </a:txBody>
@@ -17666,7 +17666,7 @@
                           </a:solidFill>
                           <a:latin typeface="Bahnschrift" panose="020B0502040204020203" pitchFamily="34" charset="0"/>
                         </a:rPr>
-                        <a:t>4.53</a:t>
+                        <a:t>4,53</a:t>
                       </a:r>
                     </a:p>
                   </a:txBody>
@@ -17725,7 +17725,7 @@
                           </a:solidFill>
                           <a:latin typeface="Bahnschrift" panose="020B0502040204020203" pitchFamily="34" charset="0"/>
                         </a:rPr>
-                        <a:t>7.21</a:t>
+                        <a:t>7,21</a:t>
                       </a:r>
                     </a:p>
                   </a:txBody>
@@ -17784,7 +17784,7 @@
                           </a:solidFill>
                           <a:latin typeface="Bahnschrift" panose="020B0502040204020203" pitchFamily="34" charset="0"/>
                         </a:rPr>
-                        <a:t>1.31</a:t>
+                        <a:t>1,31</a:t>
                       </a:r>
                     </a:p>
                   </a:txBody>
@@ -17850,7 +17850,7 @@
                           </a:solidFill>
                           <a:latin typeface="Bahnschrift" panose="020B0502040204020203" pitchFamily="34" charset="0"/>
                         </a:rPr>
-                        <a:t>2.2</a:t>
+                        <a:t>2,2</a:t>
                       </a:r>
                     </a:p>
                   </a:txBody>
@@ -17909,7 +17909,7 @@
                           </a:solidFill>
                           <a:latin typeface="Bahnschrift" panose="020B0502040204020203" pitchFamily="34" charset="0"/>
                         </a:rPr>
-                        <a:t>3.18</a:t>
+                        <a:t>3,18</a:t>
                       </a:r>
                     </a:p>
                   </a:txBody>
@@ -17968,7 +17968,7 @@
                           </a:solidFill>
                           <a:latin typeface="Bahnschrift" panose="020B0502040204020203" pitchFamily="34" charset="0"/>
                         </a:rPr>
-                        <a:t>6.63</a:t>
+                        <a:t>6,63</a:t>
                       </a:r>
                     </a:p>
                   </a:txBody>
@@ -18027,7 +18027,7 @@
                           </a:solidFill>
                           <a:latin typeface="Bahnschrift" panose="020B0502040204020203" pitchFamily="34" charset="0"/>
                         </a:rPr>
-                        <a:t>4.41</a:t>
+                        <a:t>4,41</a:t>
                       </a:r>
                     </a:p>
                   </a:txBody>
@@ -18086,7 +18086,7 @@
                           </a:solidFill>
                           <a:latin typeface="Bahnschrift" panose="020B0502040204020203" pitchFamily="34" charset="0"/>
                         </a:rPr>
-                        <a:t>1.57</a:t>
+                        <a:t>1,57</a:t>
                       </a:r>
                     </a:p>
                   </a:txBody>
@@ -18152,7 +18152,7 @@
                           </a:solidFill>
                           <a:latin typeface="Bahnschrift" panose="020B0502040204020203" pitchFamily="34" charset="0"/>
                         </a:rPr>
-                        <a:t>3.95</a:t>
+                        <a:t>3,95</a:t>
                       </a:r>
                     </a:p>
                   </a:txBody>
@@ -18211,7 +18211,7 @@
                           </a:solidFill>
                           <a:latin typeface="Bahnschrift" panose="020B0502040204020203" pitchFamily="34" charset="0"/>
                         </a:rPr>
-                        <a:t>4.5</a:t>
+                        <a:t>4,5</a:t>
                       </a:r>
                     </a:p>
                   </a:txBody>
@@ -18270,7 +18270,7 @@
                           </a:solidFill>
                           <a:latin typeface="Bahnschrift" panose="020B0502040204020203" pitchFamily="34" charset="0"/>
                         </a:rPr>
-                        <a:t>0.41</a:t>
+                        <a:t>0,41</a:t>
                       </a:r>
                     </a:p>
                   </a:txBody>
@@ -18329,7 +18329,7 @@
                           </a:solidFill>
                           <a:latin typeface="Bahnschrift" panose="020B0502040204020203" pitchFamily="34" charset="0"/>
                         </a:rPr>
-                        <a:t>2.1</a:t>
+                        <a:t>2,1</a:t>
                       </a:r>
                     </a:p>
                   </a:txBody>
@@ -18388,7 +18388,7 @@
                           </a:solidFill>
                           <a:latin typeface="Bahnschrift" panose="020B0502040204020203" pitchFamily="34" charset="0"/>
                         </a:rPr>
-                        <a:t>0.9</a:t>
+                        <a:t>0,9</a:t>
                       </a:r>
                     </a:p>
                   </a:txBody>
@@ -18454,7 +18454,7 @@
                           </a:solidFill>
                           <a:latin typeface="Bahnschrift" panose="020B0502040204020203" pitchFamily="34" charset="0"/>
                         </a:rPr>
-                        <a:t>3.3</a:t>
+                        <a:t>3,3</a:t>
                       </a:r>
                     </a:p>
                   </a:txBody>
@@ -18513,7 +18513,7 @@
                           </a:solidFill>
                           <a:latin typeface="Bahnschrift" panose="020B0502040204020203" pitchFamily="34" charset="0"/>
                         </a:rPr>
-                        <a:t>4.27</a:t>
+                        <a:t>4,27</a:t>
                       </a:r>
                     </a:p>
                   </a:txBody>
@@ -18572,7 +18572,7 @@
                           </a:solidFill>
                           <a:latin typeface="Bahnschrift" panose="020B0502040204020203" pitchFamily="34" charset="0"/>
                         </a:rPr>
-                        <a:t>1.2</a:t>
+                        <a:t>1,2</a:t>
                       </a:r>
                     </a:p>
                   </a:txBody>
@@ -18631,7 +18631,7 @@
                           </a:solidFill>
                           <a:latin typeface="Bahnschrift" panose="020B0502040204020203" pitchFamily="34" charset="0"/>
                         </a:rPr>
-                        <a:t>1.7</a:t>
+                        <a:t>1,7</a:t>
                       </a:r>
                     </a:p>
                   </a:txBody>
@@ -18690,7 +18690,7 @@
                           </a:solidFill>
                           <a:latin typeface="Bahnschrift" panose="020B0502040204020203" pitchFamily="34" charset="0"/>
                         </a:rPr>
-                        <a:t>7.3</a:t>
+                        <a:t>7,3</a:t>
                       </a:r>
                     </a:p>
                   </a:txBody>
@@ -18756,7 +18756,7 @@
                           </a:solidFill>
                           <a:latin typeface="Bahnschrift" panose="020B0502040204020203" pitchFamily="34" charset="0"/>
                         </a:rPr>
-                        <a:t>4.88</a:t>
+                        <a:t>4,88</a:t>
                       </a:r>
                     </a:p>
                   </a:txBody>
@@ -18815,7 +18815,7 @@
                           </a:solidFill>
                           <a:latin typeface="Bahnschrift" panose="020B0502040204020203" pitchFamily="34" charset="0"/>
                         </a:rPr>
-                        <a:t>0.45</a:t>
+                        <a:t>0,45</a:t>
                       </a:r>
                     </a:p>
                   </a:txBody>
@@ -18874,7 +18874,7 @@
                           </a:solidFill>
                           <a:latin typeface="Bahnschrift" panose="020B0502040204020203" pitchFamily="34" charset="0"/>
                         </a:rPr>
-                        <a:t>2.29</a:t>
+                        <a:t>2,29</a:t>
                       </a:r>
                     </a:p>
                   </a:txBody>
@@ -18933,7 +18933,7 @@
                           </a:solidFill>
                           <a:latin typeface="Bahnschrift" panose="020B0502040204020203" pitchFamily="34" charset="0"/>
                         </a:rPr>
-                        <a:t>1.14</a:t>
+                        <a:t>1,14</a:t>
                       </a:r>
                     </a:p>
                   </a:txBody>
@@ -18992,7 +18992,7 @@
                           </a:solidFill>
                           <a:latin typeface="Bahnschrift" panose="020B0502040204020203" pitchFamily="34" charset="0"/>
                         </a:rPr>
-                        <a:t>2.22</a:t>
+                        <a:t>2,22</a:t>
                       </a:r>
                     </a:p>
                   </a:txBody>
@@ -19129,7 +19129,7 @@
                           </a:solidFill>
                           <a:latin typeface="Bahnschrift" panose="020B0502040204020203" pitchFamily="34" charset="0"/>
                         </a:rPr>
-                        <a:t>6.81 – 2.31</a:t>
+                        <a:t>6,81 – 2,31</a:t>
                       </a:r>
                     </a:p>
                   </a:txBody>
@@ -19196,7 +19196,7 @@
                           </a:solidFill>
                           <a:latin typeface="Bahnschrift" panose="020B0502040204020203" pitchFamily="34" charset="0"/>
                         </a:rPr>
-                        <a:t>2.11 – 0.8</a:t>
+                        <a:t>2,11 – 0,8</a:t>
                       </a:r>
                     </a:p>
                   </a:txBody>
@@ -19263,7 +19263,7 @@
                           </a:solidFill>
                           <a:latin typeface="Bahnschrift" panose="020B0502040204020203" pitchFamily="34" charset="0"/>
                         </a:rPr>
-                        <a:t>4.5 – 2.4</a:t>
+                        <a:t>4,5 – 2,4</a:t>
                       </a:r>
                     </a:p>
                   </a:txBody>
@@ -19330,7 +19330,7 @@
                           </a:solidFill>
                           <a:latin typeface="Bahnschrift" panose="020B0502040204020203" pitchFamily="34" charset="0"/>
                         </a:rPr>
-                        <a:t>1.4 – 0.93</a:t>
+                        <a:t>1,4 – 0,93</a:t>
                       </a:r>
                     </a:p>
                   </a:txBody>
@@ -19397,7 +19397,7 @@
                           </a:solidFill>
                           <a:latin typeface="Bahnschrift" panose="020B0502040204020203" pitchFamily="34" charset="0"/>
                         </a:rPr>
-                        <a:t>7.51 – 5.22</a:t>
+                        <a:t>7,51 – 5,22</a:t>
                       </a:r>
                     </a:p>
                   </a:txBody>
@@ -19471,7 +19471,7 @@
                           </a:solidFill>
                           <a:latin typeface="Bahnschrift" panose="020B0502040204020203" pitchFamily="34" charset="0"/>
                         </a:rPr>
-                        <a:t>10.7 – 3.4</a:t>
+                        <a:t>10,7 – 3,4</a:t>
                       </a:r>
                     </a:p>
                   </a:txBody>
@@ -19538,7 +19538,7 @@
                           </a:solidFill>
                           <a:latin typeface="Bahnschrift" panose="020B0502040204020203" pitchFamily="34" charset="0"/>
                         </a:rPr>
-                        <a:t>8.4 – 3.52</a:t>
+                        <a:t>8,4 – 3,52</a:t>
                       </a:r>
                     </a:p>
                   </a:txBody>
@@ -19605,7 +19605,7 @@
                           </a:solidFill>
                           <a:latin typeface="Bahnschrift" panose="020B0502040204020203" pitchFamily="34" charset="0"/>
                         </a:rPr>
-                        <a:t>10.5 – 3.87</a:t>
+                        <a:t>10,5 – 3,87</a:t>
                       </a:r>
                     </a:p>
                   </a:txBody>
@@ -19672,7 +19672,7 @@
                           </a:solidFill>
                           <a:latin typeface="Bahnschrift" panose="020B0502040204020203" pitchFamily="34" charset="0"/>
                         </a:rPr>
-                        <a:t>3.9 – 0.6</a:t>
+                        <a:t>3,9 – 0,6</a:t>
                       </a:r>
                     </a:p>
                   </a:txBody>
@@ -19739,7 +19739,7 @@
                           </a:solidFill>
                           <a:latin typeface="Bahnschrift" panose="020B0502040204020203" pitchFamily="34" charset="0"/>
                         </a:rPr>
-                        <a:t>2.6 – 2.19</a:t>
+                        <a:t>2,6 – 2,19</a:t>
                       </a:r>
                     </a:p>
                   </a:txBody>
@@ -19813,7 +19813,7 @@
                           </a:solidFill>
                           <a:latin typeface="Bahnschrift" panose="020B0502040204020203" pitchFamily="34" charset="0"/>
                         </a:rPr>
-                        <a:t>9.1 – 4.83</a:t>
+                        <a:t>9,1 – 4,83</a:t>
                       </a:r>
                     </a:p>
                   </a:txBody>
@@ -19880,7 +19880,7 @@
                           </a:solidFill>
                           <a:latin typeface="Bahnschrift" panose="020B0502040204020203" pitchFamily="34" charset="0"/>
                         </a:rPr>
-                        <a:t>5.82 – 4.25</a:t>
+                        <a:t>5,82 – 4,25</a:t>
                       </a:r>
                     </a:p>
                   </a:txBody>
@@ -19947,7 +19947,7 @@
                           </a:solidFill>
                           <a:latin typeface="Bahnschrift" panose="020B0502040204020203" pitchFamily="34" charset="0"/>
                         </a:rPr>
-                        <a:t>5.32 – 2.14</a:t>
+                        <a:t>5,32 – 2,14</a:t>
                       </a:r>
                     </a:p>
                   </a:txBody>
@@ -20014,7 +20014,7 @@
                           </a:solidFill>
                           <a:latin typeface="Bahnschrift" panose="020B0502040204020203" pitchFamily="34" charset="0"/>
                         </a:rPr>
-                        <a:t>6.32 – 4.1</a:t>
+                        <a:t>6,32 – 4,1</a:t>
                       </a:r>
                     </a:p>
                   </a:txBody>
@@ -20081,7 +20081,7 @@
                           </a:solidFill>
                           <a:latin typeface="Bahnschrift" panose="020B0502040204020203" pitchFamily="34" charset="0"/>
                         </a:rPr>
-                        <a:t>3.8 – 1.6</a:t>
+                        <a:t>3,8 – 1,6</a:t>
                       </a:r>
                     </a:p>
                   </a:txBody>
@@ -20155,7 +20155,7 @@
                           </a:solidFill>
                           <a:latin typeface="Bahnschrift" panose="020B0502040204020203" pitchFamily="34" charset="0"/>
                         </a:rPr>
-                        <a:t>11.5 – 4.29</a:t>
+                        <a:t>11,5 – 4,29</a:t>
                       </a:r>
                     </a:p>
                   </a:txBody>
@@ -20222,7 +20222,7 @@
                           </a:solidFill>
                           <a:latin typeface="Bahnschrift" panose="020B0502040204020203" pitchFamily="34" charset="0"/>
                         </a:rPr>
-                        <a:t>4.4 – 2.7</a:t>
+                        <a:t>4,4 – 2,7</a:t>
                       </a:r>
                     </a:p>
                   </a:txBody>
@@ -20289,7 +20289,7 @@
                           </a:solidFill>
                           <a:latin typeface="Bahnschrift" panose="020B0502040204020203" pitchFamily="34" charset="0"/>
                         </a:rPr>
-                        <a:t>9.83 – 5.3</a:t>
+                        <a:t>9,83 – 5,3</a:t>
                       </a:r>
                     </a:p>
                   </a:txBody>
@@ -20356,7 +20356,7 @@
                           </a:solidFill>
                           <a:latin typeface="Bahnschrift" panose="020B0502040204020203" pitchFamily="34" charset="0"/>
                         </a:rPr>
-                        <a:t>5.7 – 4.56</a:t>
+                        <a:t>5,7 – 4,56</a:t>
                       </a:r>
                     </a:p>
                   </a:txBody>
@@ -20423,7 +20423,7 @@
                           </a:solidFill>
                           <a:latin typeface="Bahnschrift" panose="020B0502040204020203" pitchFamily="34" charset="0"/>
                         </a:rPr>
-                        <a:t>8.13 – 4.18</a:t>
+                        <a:t>8,13 – 4,18</a:t>
                       </a:r>
                     </a:p>
                   </a:txBody>
